--- a/public/blog/presentations/es/truck-accident-in-fargo-north-dakota-steps-legal-help-2026.pptx
+++ b/public/blog/presentations/es/truck-accident-in-fargo-north-dakota-steps-legal-help-2026.pptx
@@ -4704,7 +4704,7 @@
               </a:defRPr>
             </a:pPr>
             <a:r>
-              <a:t>Truck Accidents · North Dakota · 2026-06-03</a:t>
+              <a:t>Truck Accidents · North Dakota · 2026-06-08</a:t>
             </a:r>
           </a:p>
         </p:txBody>
